--- a/gallery/renders/text_length_test_complex.pptx
+++ b/gallery/renders/text_length_test_complex.pptx
@@ -46,7 +46,9 @@
           <a:bodyPr wrap="square" lIns="0" rIns="0" tIns="0" bIns="0"/>
           <a:lstStyle/>
           <a:p>
-            <a:pPr algn="l"/>
+            <a:pPr algn="l">
+              <a:buNone/>
+            </a:pPr>
             <a:r>
               <a:rPr lang="en-US" sz="2200">
                 <a:latin typeface="Arial"/>
@@ -76,12 +78,14 @@
           <a:bodyPr wrap="square" lIns="0" rIns="0" tIns="0" bIns="0"/>
           <a:lstStyle/>
           <a:p>
-            <a:pPr algn="l"/>
+            <a:pPr algn="l">
+              <a:buNone/>
+            </a:pPr>
             <a:r>
               <a:rPr lang="en-US" sz="1000">
                 <a:latin typeface="Arial"/>
               </a:rPr>
-              <a:t>Extremely long text. Extremely long text. Extremely long text. Extremely long text. Extremely long text. Extremely long text. Extremely long text. Extremely long text. Extremely long text. Extremely long text. Extremely long text. Extremely long text. Extremely long text. Extremely long text. Extremely long text. Extremely long text. Extremely long text. Extremely long text. Extremely long text. Extremely long text. Extremely long text. Extremely long text. Extremely long text. Extremely long text. Extremely long text. Extremely long text. Extremely long text. Extremely long text. Extremely long text. Extremely long text. Extremely long text. Extremely long text. Extremely long text. Extremely long text. Extremely long text. Extremely long text. Extremely long text. Extremely long text. Extremely long text. Extremely long text. Extremely long text. Extremely long text. Extremely long text. Extremely long text. Extremely long text. Extremely long text. Extremely long text. Extremely long text. Extremely long text. Extremely long text. Extremely long text. Extremely long text. Extremely long text. Extremely long text. Extremely long text. Extremely long text. Extremely long text. Extremely long text. Extremely long text. Extremely long text. Extremely long text. Extremely long text. Extremely long text. Extremely long text. Extremely long text. Extremely long text. Extremely long text. Extremely long text. Extremely long text. Extremely long text. Extremely long text. Extremely long text. Extremely long text. Extremely long text. Extremely long text. Extremely long text. Extremely long text. Extremely long text. Extremely long text. Extremely long text. Extremely long text. Extremely long text. Extremely long text. Extremely long text. Extremely long text. Extremely long text. Extremely long text. Extremely long text. Extremely long text. Extremely long text. Extremely long text. Extremely long text. Extremely long text. Extremely long text. Extremely long text. Extremely long text. Extremely long text. Extremely long text. Extremely long text. Extremely long text. Extremely long text. Extremely long text. Extremely long text. Extremely long text. Extremely long text. Extremely long text. Extremely long text. Extremely long text. Extremely long text. Extremely long text. Extremely long text. Extremely long text. Extremely long text. Extremely long text. Extremely long text. Extremely long text. Extremely long text. Extremely long text. Extremely long text. Extremely long text. Extremely long text. Extremely long text. Extremely long text. Extremely long text. Extremely long text. Extremely long text. Extremely long text. Extremely long text. Extremely long text. Extremely long text. Extremely long text. Extremely long text. Extremely long text. Extremely long text. Extremely long text. Extremely long text. Extremely long text. Extremely long text. Extremely long text. Extremely long text. Extremely long text. Extremely long text. Extremely long text. Extremely long text. Extremely long text. Extremely long text. Extremely long text. Extremely long text. Extremely long text. Extremely long text. </a:t>
+              <a:t>Extremely long text. Extremely long text. Extremely long text. Extremely long text. Extremely long text. Extremely long text. Extremely long text. Extremely long text. Extremely long text. Extremely long text. Extremely long text. Extremely long text. Extremely long text. Extremely long text. Extremely long text. Extremely long text. Extremely long text. Extremely long text. Extremely long text. Extremely long text. Extremely long text. Extremely long text. Extremely long text. Extremely long text. Extremely long text. Extremely long text. Extremely long text. Extremely long text. Extremely long text. Extremely long text. Extremely long text. Extremely long text. Extremely long text. Extremely long text. Extremely long text. Extremely long text. Extremely long text. Extremely long text. Extremely long text. Extremely long text. Extremely long text. Extremely long text. Extremely long text. Extremely long text. Extremely long text. Extremely long text. Extremely long text. Extremely long text. Extremely long text. Extremely long text. Extremely long text. Extremely long text. Extremely long text. Extremely long text. Extremely long text. Extremely long text. Extremely long text. Extremely long text. Extremely long text. Extremely long text. Extremely long text. Extremely long text. Extremely long text. Extremely long text. Extremely long text. Extremely long text. Extremely long text. Extremely long text. Extremely long text. Extremely long text. Extremely long text. Extremely long text. Extremely long text. Extremely long text. Extremely long text. Extremely long text. Extremely long text. Extremely long text. Extremely long text. Extremely long text. Extremely long text. Extremely long text. Extremely long text. Extremely long text. Extremely long text. Extremely long text. Extremely long text. Extremely long text. Extremely long text. Extremely long text. Extremely long text. Extremely long text. Extremely long text. Extremely long text. Extremely long text. Extremely long text. Extremely long text. Extremely long text. Extremely long text. Extremely long text. Extremely long text. Extremely long text. Extremely long text. Extremely long text. Extremely long text. Extremely long text. Extremely long text. Extremely long text. Extremely long text. Extremely long text. Extremely long text. Extremely long text. Extremely long text. Extremely long text. Extremely long text. Extremely long text. Extremely long text. Extremely long text. Extremely long text. Extremely long text. Extremely long text. Extremely long text. Extremely long text. Extremely long text. Extremely long text. Extremely long text. Extremely long text. Extremely long text. Extremely long text. Extremely long text. Extremely long text. Extremely long text. Extremely long text. Extremely long text. Extremely long text. Extremely long text. Extremely long text. Extremely long text. Extremely long text. Extremely long text. Extremely long text. Extremely long text. Extremely long text. Extremely long text. Extremely long text. Extremely long text. Extremely long text. Extremely long text. Extremely long text. Extremely long text.</a:t>
             </a:r>
           </a:p>
         </p:txBody>
@@ -106,7 +110,9 @@
           <a:bodyPr wrap="square" lIns="0" rIns="0" tIns="0" bIns="0"/>
           <a:lstStyle/>
           <a:p>
-            <a:pPr algn="l"/>
+            <a:pPr algn="l">
+              <a:buNone/>
+            </a:pPr>
             <a:r>
               <a:rPr lang="en-US" sz="3600" b="1">
                 <a:latin typeface="Arial"/>

--- a/gallery/renders/text_length_test_complex.pptx
+++ b/gallery/renders/text_length_test_complex.pptx
@@ -35,7 +35,7 @@
         <p:spPr>
           <a:xfrm>
             <a:off x="910336" y="1806854"/>
-            <a:ext cx="5331968" cy="4952390"/>
+            <a:ext cx="5331968" cy="335280"/>
           </a:xfrm>
           <a:prstGeom prst="rect">
             <a:avLst/>
@@ -67,7 +67,7 @@
         <p:spPr>
           <a:xfrm>
             <a:off x="6762496" y="1806854"/>
-            <a:ext cx="5331968" cy="4952390"/>
+            <a:ext cx="5331968" cy="5791200"/>
           </a:xfrm>
           <a:prstGeom prst="rect">
             <a:avLst/>
@@ -99,7 +99,7 @@
         <p:spPr>
           <a:xfrm>
             <a:off x="910336" y="460857"/>
-            <a:ext cx="11184128" cy="1046073"/>
+            <a:ext cx="11184128" cy="548640"/>
           </a:xfrm>
           <a:prstGeom prst="rect">
             <a:avLst/>

--- a/gallery/renders/text_length_test_complex.pptx
+++ b/gallery/renders/text_length_test_complex.pptx
@@ -67,7 +67,7 @@
         <p:spPr>
           <a:xfrm>
             <a:off x="6762496" y="1806854"/>
-            <a:ext cx="5331968" cy="5791200"/>
+            <a:ext cx="5331968" cy="5181600"/>
           </a:xfrm>
           <a:prstGeom prst="rect">
             <a:avLst/>
